--- a/slides/week06_progress.pptx
+++ b/slides/week06_progress.pptx
@@ -5075,7 +5075,7 @@
                 </a:solidFill>
                 <a:latin typeface="Calibri"/>
               </a:rPr>
-              <a:t>•  BloodMNIST AUROC: continuous 0.983 ± 0.002, VQ 0.966 ± 0.001</a:t>
+              <a:t>•  BloodMNIST AUROC: continuous 0.981 ± 0.001, VQ 0.963 ± 0.001</a:t>
             </a:r>
           </a:p>
           <a:p>
@@ -5091,7 +5091,7 @@
                 </a:solidFill>
                 <a:latin typeface="Calibri"/>
               </a:rPr>
-              <a:t>•  Mortality AUROC: continuous 0.783 ± 0.003, event 0.778 ± 0.006, VQ 0.727 ± 0.017</a:t>
+              <a:t>•  Mortality AUROC: continuous 0.794 ± 0.009, event 0.792 ± 0.017, VQ 0.745 ± 0.010</a:t>
             </a:r>
           </a:p>
           <a:p>
@@ -6997,7 +6997,7 @@
                           </a:solidFill>
                           <a:latin typeface="Calibri"/>
                         </a:rPr>
-                        <a:t>AUROC 0.983 ± 0.002</a:t>
+                        <a:t>AUROC 0.981 ± 0.001</a:t>
                       </a:r>
                     </a:p>
                   </a:txBody>
@@ -7019,7 +7019,7 @@
                           </a:solidFill>
                           <a:latin typeface="Calibri"/>
                         </a:rPr>
-                        <a:t>macro-F1 0.838 ± 0.015</a:t>
+                        <a:t>macro-F1 0.820 ± 0.008</a:t>
                       </a:r>
                     </a:p>
                   </a:txBody>
@@ -7153,7 +7153,7 @@
                           </a:solidFill>
                           <a:latin typeface="Calibri"/>
                         </a:rPr>
-                        <a:t>AUROC 0.966 ± 0.001</a:t>
+                        <a:t>AUROC 0.963 ± 0.001</a:t>
                       </a:r>
                     </a:p>
                   </a:txBody>
@@ -7175,7 +7175,7 @@
                           </a:solidFill>
                           <a:latin typeface="Calibri"/>
                         </a:rPr>
-                        <a:t>macro-F1 0.759 ± 0.007</a:t>
+                        <a:t>macro-F1 0.749 ± 0.001</a:t>
                       </a:r>
                     </a:p>
                   </a:txBody>
@@ -7309,7 +7309,7 @@
                           </a:solidFill>
                           <a:latin typeface="Calibri"/>
                         </a:rPr>
-                        <a:t>AUROC 0.783 ± 0.003</a:t>
+                        <a:t>AUROC 0.794 ± 0.009</a:t>
                       </a:r>
                     </a:p>
                   </a:txBody>
@@ -7331,7 +7331,7 @@
                           </a:solidFill>
                           <a:latin typeface="Calibri"/>
                         </a:rPr>
-                        <a:t>AUPRC 0.428 ± 0.003</a:t>
+                        <a:t>AUPRC 0.437 ± 0.008</a:t>
                       </a:r>
                     </a:p>
                   </a:txBody>
@@ -7465,7 +7465,7 @@
                           </a:solidFill>
                           <a:latin typeface="Calibri"/>
                         </a:rPr>
-                        <a:t>AUROC 0.727 ± 0.017</a:t>
+                        <a:t>AUROC 0.745 ± 0.010</a:t>
                       </a:r>
                     </a:p>
                   </a:txBody>
@@ -7487,7 +7487,7 @@
                           </a:solidFill>
                           <a:latin typeface="Calibri"/>
                         </a:rPr>
-                        <a:t>AUPRC 0.324 ± 0.022</a:t>
+                        <a:t>AUPRC 0.329 ± 0.036</a:t>
                       </a:r>
                     </a:p>
                   </a:txBody>
@@ -7621,7 +7621,7 @@
                           </a:solidFill>
                           <a:latin typeface="Calibri"/>
                         </a:rPr>
-                        <a:t>AUROC 0.778 ± 0.006</a:t>
+                        <a:t>AUROC 0.792 ± 0.017</a:t>
                       </a:r>
                     </a:p>
                   </a:txBody>
@@ -7643,7 +7643,7 @@
                           </a:solidFill>
                           <a:latin typeface="Calibri"/>
                         </a:rPr>
-                        <a:t>AUPRC 0.425 ± 0.021</a:t>
+                        <a:t>AUPRC 0.455 ± 0.021</a:t>
                       </a:r>
                     </a:p>
                   </a:txBody>
@@ -7777,7 +7777,7 @@
                           </a:solidFill>
                           <a:latin typeface="Calibri"/>
                         </a:rPr>
-                        <a:t>AUROC 0.763 ± 0.018</a:t>
+                        <a:t>AUROC 0.756 ± 0.003</a:t>
                       </a:r>
                     </a:p>
                   </a:txBody>
@@ -7799,7 +7799,7 @@
                           </a:solidFill>
                           <a:latin typeface="Calibri"/>
                         </a:rPr>
-                        <a:t>AUPRC 0.366 ± 0.035</a:t>
+                        <a:t>AUPRC 0.346 ± 0.016</a:t>
                       </a:r>
                     </a:p>
                   </a:txBody>
